--- a/assets/powerpoints/module-n2-bonjour/B2-ma-journee-au-present.pptx
+++ b/assets/powerpoints/module-n2-bonjour/B2-ma-journee-au-present.pptx
@@ -10881,7 +10881,52 @@
                 </a:solidFill>
                 <a:latin typeface="Verdana"/>
               </a:rPr>
-              <a:t>je déjeun&lt;b&gt;e&lt;/b&gt; · je travaill&lt;b&gt;e&lt;/b&gt; · je march&lt;b&gt;e&lt;/b&gt;</a:t>
+              <a:t>je déjeun</a:t>
+            </a:r>
+            <a:r>
+              <a:rPr sz="1800" b="1" i="0">
+                <a:solidFill>
+                  <a:srgbClr val="3A3D40"/>
+                </a:solidFill>
+                <a:latin typeface="Verdana"/>
+              </a:rPr>
+              <a:t>e</a:t>
+            </a:r>
+            <a:r>
+              <a:rPr sz="1800" b="0" i="0">
+                <a:solidFill>
+                  <a:srgbClr val="3A3D40"/>
+                </a:solidFill>
+                <a:latin typeface="Verdana"/>
+              </a:rPr>
+              <a:t> · je travaill</a:t>
+            </a:r>
+            <a:r>
+              <a:rPr sz="1800" b="1" i="0">
+                <a:solidFill>
+                  <a:srgbClr val="3A3D40"/>
+                </a:solidFill>
+                <a:latin typeface="Verdana"/>
+              </a:rPr>
+              <a:t>e</a:t>
+            </a:r>
+            <a:r>
+              <a:rPr sz="1800" b="0" i="0">
+                <a:solidFill>
+                  <a:srgbClr val="3A3D40"/>
+                </a:solidFill>
+                <a:latin typeface="Verdana"/>
+              </a:rPr>
+              <a:t> · je march</a:t>
+            </a:r>
+            <a:r>
+              <a:rPr sz="1800" b="1" i="0">
+                <a:solidFill>
+                  <a:srgbClr val="3A3D40"/>
+                </a:solidFill>
+                <a:latin typeface="Verdana"/>
+              </a:rPr>
+              <a:t>e</a:t>
             </a:r>
           </a:p>
         </p:txBody>
@@ -11001,7 +11046,34 @@
                 </a:solidFill>
                 <a:latin typeface="Verdana"/>
               </a:rPr>
-              <a:t>tu déjeun&lt;b&gt;es&lt;/b&gt; · tu travaill&lt;b&gt;es&lt;/b&gt;</a:t>
+              <a:t>tu déjeun</a:t>
+            </a:r>
+            <a:r>
+              <a:rPr sz="1800" b="1" i="0">
+                <a:solidFill>
+                  <a:srgbClr val="3A3D40"/>
+                </a:solidFill>
+                <a:latin typeface="Verdana"/>
+              </a:rPr>
+              <a:t>es</a:t>
+            </a:r>
+            <a:r>
+              <a:rPr sz="1800" b="0" i="0">
+                <a:solidFill>
+                  <a:srgbClr val="3A3D40"/>
+                </a:solidFill>
+                <a:latin typeface="Verdana"/>
+              </a:rPr>
+              <a:t> · tu travaill</a:t>
+            </a:r>
+            <a:r>
+              <a:rPr sz="1800" b="1" i="0">
+                <a:solidFill>
+                  <a:srgbClr val="3A3D40"/>
+                </a:solidFill>
+                <a:latin typeface="Verdana"/>
+              </a:rPr>
+              <a:t>es</a:t>
             </a:r>
           </a:p>
         </p:txBody>
@@ -11121,7 +11193,34 @@
                 </a:solidFill>
                 <a:latin typeface="Verdana"/>
               </a:rPr>
-              <a:t>vous déjeun&lt;b&gt;ez&lt;/b&gt; · vous travaill&lt;b&gt;ez&lt;/b&gt;</a:t>
+              <a:t>vous déjeun</a:t>
+            </a:r>
+            <a:r>
+              <a:rPr sz="1800" b="1" i="0">
+                <a:solidFill>
+                  <a:srgbClr val="3A3D40"/>
+                </a:solidFill>
+                <a:latin typeface="Verdana"/>
+              </a:rPr>
+              <a:t>ez</a:t>
+            </a:r>
+            <a:r>
+              <a:rPr sz="1800" b="0" i="0">
+                <a:solidFill>
+                  <a:srgbClr val="3A3D40"/>
+                </a:solidFill>
+                <a:latin typeface="Verdana"/>
+              </a:rPr>
+              <a:t> · vous travaill</a:t>
+            </a:r>
+            <a:r>
+              <a:rPr sz="1800" b="1" i="0">
+                <a:solidFill>
+                  <a:srgbClr val="3A3D40"/>
+                </a:solidFill>
+                <a:latin typeface="Verdana"/>
+              </a:rPr>
+              <a:t>ez</a:t>
             </a:r>
           </a:p>
         </p:txBody>
@@ -12367,13 +12466,58 @@
               </a:lnSpc>
             </a:pPr>
             <a:r>
+              <a:rPr sz="2000" b="1" i="0">
+                <a:solidFill>
+                  <a:srgbClr val="4B4F52"/>
+                </a:solidFill>
+                <a:latin typeface="Verdana"/>
+              </a:rPr>
+              <a:t>j'</a:t>
+            </a:r>
+            <a:r>
               <a:rPr sz="2000" b="0" i="0">
                 <a:solidFill>
                   <a:srgbClr val="4B4F52"/>
                 </a:solidFill>
                 <a:latin typeface="Verdana"/>
               </a:rPr>
-              <a:t>&lt;b&gt;j'&lt;/b&gt;étudie, &lt;b&gt;j'&lt;/b&gt;habite, &lt;b&gt;j'&lt;/b&gt;arrive. On ne dit jamais « je étudie ». Le h de « habite » ne compte pas : il ne se prononce pas.</a:t>
+              <a:t>étudie, </a:t>
+            </a:r>
+            <a:r>
+              <a:rPr sz="2000" b="1" i="0">
+                <a:solidFill>
+                  <a:srgbClr val="4B4F52"/>
+                </a:solidFill>
+                <a:latin typeface="Verdana"/>
+              </a:rPr>
+              <a:t>j'</a:t>
+            </a:r>
+            <a:r>
+              <a:rPr sz="2000" b="0" i="0">
+                <a:solidFill>
+                  <a:srgbClr val="4B4F52"/>
+                </a:solidFill>
+                <a:latin typeface="Verdana"/>
+              </a:rPr>
+              <a:t>habite, </a:t>
+            </a:r>
+            <a:r>
+              <a:rPr sz="2000" b="1" i="0">
+                <a:solidFill>
+                  <a:srgbClr val="4B4F52"/>
+                </a:solidFill>
+                <a:latin typeface="Verdana"/>
+              </a:rPr>
+              <a:t>j'</a:t>
+            </a:r>
+            <a:r>
+              <a:rPr sz="2000" b="0" i="0">
+                <a:solidFill>
+                  <a:srgbClr val="4B4F52"/>
+                </a:solidFill>
+                <a:latin typeface="Verdana"/>
+              </a:rPr>
+              <a:t>arrive. On ne dit jamais « je étudie ». Le h de « habite » ne compte pas : il ne se prononce pas.</a:t>
             </a:r>
           </a:p>
         </p:txBody>
